--- a/Draft 23 Out 26.pptx
+++ b/Draft 23 Out 26.pptx
@@ -181,6 +181,113 @@
 </p:presentation>
 </file>
 
+<file path=ppt/revisionInfo.xml><?xml version="1.0" encoding="utf-8"?>
+<p1510:revInfo xmlns:a="http://schemas.openxmlformats.org/drawingml/2006/main" xmlns:r="http://schemas.openxmlformats.org/officeDocument/2006/relationships" xmlns:p1510="http://schemas.microsoft.com/office/powerpoint/2015/10/main">
+  <p1510:revLst>
+    <p1510:client id="{00000000-0000-0000-0000-000000000000}" v="4" dt="2026-10-23T21:26:55.441"/>
+    <p1510:client id="{55A795F2-6FF2-D3C7-B9D3-9D78B3F6F150}" v="10" dt="2026-10-23T20:39:04.185"/>
+  </p1510:revLst>
+</p1510:revInfo>
+</file>
+
+<file path=ppt/changesInfos/changesInfo1.xml><?xml version="1.0" encoding="utf-8"?>
+<pc:chgInfo xmlns:a="http://schemas.openxmlformats.org/drawingml/2006/main" xmlns:r="http://schemas.openxmlformats.org/officeDocument/2006/relationships" xmlns:ac="http://schemas.microsoft.com/office/drawing/2013/main/command" xmlns:pc="http://schemas.microsoft.com/office/powerpoint/2013/main/command">
+  <pc:docChgLst>
+    <pc:chgData name="Matteo Lucato" userId="S::mlucato@atyconsulting.com::8e289e5b-9758-4658-b254-46f5eefe8750" providerId="AD" clId="Web-{55A795F2-6FF2-D3C7-B9D3-9D78B3F6F150}"/>
+    <pc:docChg chg="modSld">
+      <pc:chgData name="Matteo Lucato" userId="S::mlucato@atyconsulting.com::8e289e5b-9758-4658-b254-46f5eefe8750" providerId="AD" clId="Web-{55A795F2-6FF2-D3C7-B9D3-9D78B3F6F150}" dt="2026-10-23T20:39:04.185" v="9" actId="1076"/>
+      <pc:docMkLst>
+        <pc:docMk/>
+      </pc:docMkLst>
+      <pc:sldChg chg="modSp">
+        <pc:chgData name="Matteo Lucato" userId="S::mlucato@atyconsulting.com::8e289e5b-9758-4658-b254-46f5eefe8750" providerId="AD" clId="Web-{55A795F2-6FF2-D3C7-B9D3-9D78B3F6F150}" dt="2026-10-23T20:39:04.185" v="9" actId="1076"/>
+        <pc:sldMkLst>
+          <pc:docMk/>
+          <pc:sldMk cId="1683741435" sldId="258"/>
+        </pc:sldMkLst>
+        <pc:picChg chg="mod">
+          <ac:chgData name="Matteo Lucato" userId="S::mlucato@atyconsulting.com::8e289e5b-9758-4658-b254-46f5eefe8750" providerId="AD" clId="Web-{55A795F2-6FF2-D3C7-B9D3-9D78B3F6F150}" dt="2026-10-23T20:39:04.185" v="9" actId="1076"/>
+          <ac:picMkLst>
+            <pc:docMk/>
+            <pc:sldMk cId="1683741435" sldId="258"/>
+            <ac:picMk id="3" creationId="{9FCAF65A-A318-751E-7FCD-4020A0DD66A9}"/>
+          </ac:picMkLst>
+        </pc:picChg>
+      </pc:sldChg>
+      <pc:sldChg chg="modSp">
+        <pc:chgData name="Matteo Lucato" userId="S::mlucato@atyconsulting.com::8e289e5b-9758-4658-b254-46f5eefe8750" providerId="AD" clId="Web-{55A795F2-6FF2-D3C7-B9D3-9D78B3F6F150}" dt="2026-10-23T18:59:05.153" v="1" actId="14100"/>
+        <pc:sldMkLst>
+          <pc:docMk/>
+          <pc:sldMk cId="190062692" sldId="268"/>
+        </pc:sldMkLst>
+        <pc:picChg chg="mod">
+          <ac:chgData name="Matteo Lucato" userId="S::mlucato@atyconsulting.com::8e289e5b-9758-4658-b254-46f5eefe8750" providerId="AD" clId="Web-{55A795F2-6FF2-D3C7-B9D3-9D78B3F6F150}" dt="2026-10-23T18:59:05.153" v="1" actId="14100"/>
+          <ac:picMkLst>
+            <pc:docMk/>
+            <pc:sldMk cId="190062692" sldId="268"/>
+            <ac:picMk id="3" creationId="{0D02655F-D0F1-C331-5D33-B77EAA106737}"/>
+          </ac:picMkLst>
+        </pc:picChg>
+      </pc:sldChg>
+      <pc:sldChg chg="modSp">
+        <pc:chgData name="Matteo Lucato" userId="S::mlucato@atyconsulting.com::8e289e5b-9758-4658-b254-46f5eefe8750" providerId="AD" clId="Web-{55A795F2-6FF2-D3C7-B9D3-9D78B3F6F150}" dt="2026-10-23T19:33:01.957" v="4" actId="1076"/>
+        <pc:sldMkLst>
+          <pc:docMk/>
+          <pc:sldMk cId="3460347714" sldId="289"/>
+        </pc:sldMkLst>
+        <pc:picChg chg="mod">
+          <ac:chgData name="Matteo Lucato" userId="S::mlucato@atyconsulting.com::8e289e5b-9758-4658-b254-46f5eefe8750" providerId="AD" clId="Web-{55A795F2-6FF2-D3C7-B9D3-9D78B3F6F150}" dt="2026-10-23T19:33:01.957" v="4" actId="1076"/>
+          <ac:picMkLst>
+            <pc:docMk/>
+            <pc:sldMk cId="3460347714" sldId="289"/>
+            <ac:picMk id="3" creationId="{5D11A3D8-E526-455C-5793-B961537607E0}"/>
+          </ac:picMkLst>
+        </pc:picChg>
+      </pc:sldChg>
+      <pc:sldChg chg="modSp">
+        <pc:chgData name="Matteo Lucato" userId="S::mlucato@atyconsulting.com::8e289e5b-9758-4658-b254-46f5eefe8750" providerId="AD" clId="Web-{55A795F2-6FF2-D3C7-B9D3-9D78B3F6F150}" dt="2026-10-23T19:53:08.087" v="5" actId="14100"/>
+        <pc:sldMkLst>
+          <pc:docMk/>
+          <pc:sldMk cId="3591240637" sldId="315"/>
+        </pc:sldMkLst>
+        <pc:picChg chg="mod">
+          <ac:chgData name="Matteo Lucato" userId="S::mlucato@atyconsulting.com::8e289e5b-9758-4658-b254-46f5eefe8750" providerId="AD" clId="Web-{55A795F2-6FF2-D3C7-B9D3-9D78B3F6F150}" dt="2026-10-23T19:53:08.087" v="5" actId="14100"/>
+          <ac:picMkLst>
+            <pc:docMk/>
+            <pc:sldMk cId="3591240637" sldId="315"/>
+            <ac:picMk id="7" creationId="{E39D664A-E9B0-CF1F-E210-836583AC97A9}"/>
+          </ac:picMkLst>
+        </pc:picChg>
+      </pc:sldChg>
+    </pc:docChg>
+  </pc:docChgLst>
+  <pc:docChgLst>
+    <pc:chgData name="Matteo Lucato" userId="S::mlucato@atyconsulting.com::8e289e5b-9758-4658-b254-46f5eefe8750" providerId="AD" clId="Web-{00000000-0000-0000-0000-000000000000}"/>
+    <pc:docChg chg="modSld">
+      <pc:chgData name="Matteo Lucato" userId="S::mlucato@atyconsulting.com::8e289e5b-9758-4658-b254-46f5eefe8750" providerId="AD" clId="Web-{00000000-0000-0000-0000-000000000000}" dt="2026-10-23T21:26:55.441" v="3" actId="1076"/>
+      <pc:docMkLst>
+        <pc:docMk/>
+      </pc:docMkLst>
+      <pc:sldChg chg="modSp">
+        <pc:chgData name="Matteo Lucato" userId="S::mlucato@atyconsulting.com::8e289e5b-9758-4658-b254-46f5eefe8750" providerId="AD" clId="Web-{00000000-0000-0000-0000-000000000000}" dt="2026-10-23T21:26:55.441" v="3" actId="1076"/>
+        <pc:sldMkLst>
+          <pc:docMk/>
+          <pc:sldMk cId="190062692" sldId="268"/>
+        </pc:sldMkLst>
+        <pc:picChg chg="mod">
+          <ac:chgData name="Matteo Lucato" userId="S::mlucato@atyconsulting.com::8e289e5b-9758-4658-b254-46f5eefe8750" providerId="AD" clId="Web-{00000000-0000-0000-0000-000000000000}" dt="2026-10-23T21:26:55.441" v="3" actId="1076"/>
+          <ac:picMkLst>
+            <pc:docMk/>
+            <pc:sldMk cId="190062692" sldId="268"/>
+            <ac:picMk id="3" creationId="{0D02655F-D0F1-C331-5D33-B77EAA106737}"/>
+          </ac:picMkLst>
+        </pc:picChg>
+      </pc:sldChg>
+    </pc:docChg>
+  </pc:docChgLst>
+</pc:chgInfo>
+</file>
+
 <file path=ppt/slideLayouts/slideLayout1.xml><?xml version="1.0" encoding="utf-8"?>
 <p:sldLayout xmlns:a="http://schemas.openxmlformats.org/drawingml/2006/main" xmlns:r="http://schemas.openxmlformats.org/officeDocument/2006/relationships" xmlns:p="http://schemas.openxmlformats.org/presentationml/2006/main" type="title" preserve="1">
   <p:cSld name="Slide de Título">
@@ -382,7 +489,7 @@
           <a:p>
             <a:fld id="{0BA471F3-CE83-48E3-913B-238604523619}" type="slidenum">
               <a:rPr lang="pt-BR" smtClean="0"/>
-              <a:t>‹nº›</a:t>
+              <a:t>‹#›</a:t>
             </a:fld>
             <a:endParaRPr lang="pt-BR"/>
           </a:p>
@@ -580,7 +687,7 @@
           <a:p>
             <a:fld id="{0BA471F3-CE83-48E3-913B-238604523619}" type="slidenum">
               <a:rPr lang="pt-BR" smtClean="0"/>
-              <a:t>‹nº›</a:t>
+              <a:t>‹#›</a:t>
             </a:fld>
             <a:endParaRPr lang="pt-BR"/>
           </a:p>
@@ -788,7 +895,7 @@
           <a:p>
             <a:fld id="{0BA471F3-CE83-48E3-913B-238604523619}" type="slidenum">
               <a:rPr lang="pt-BR" smtClean="0"/>
-              <a:t>‹nº›</a:t>
+              <a:t>‹#›</a:t>
             </a:fld>
             <a:endParaRPr lang="pt-BR"/>
           </a:p>
@@ -986,7 +1093,7 @@
           <a:p>
             <a:fld id="{0BA471F3-CE83-48E3-913B-238604523619}" type="slidenum">
               <a:rPr lang="pt-BR" smtClean="0"/>
-              <a:t>‹nº›</a:t>
+              <a:t>‹#›</a:t>
             </a:fld>
             <a:endParaRPr lang="pt-BR"/>
           </a:p>
@@ -1261,7 +1368,7 @@
           <a:p>
             <a:fld id="{0BA471F3-CE83-48E3-913B-238604523619}" type="slidenum">
               <a:rPr lang="pt-BR" smtClean="0"/>
-              <a:t>‹nº›</a:t>
+              <a:t>‹#›</a:t>
             </a:fld>
             <a:endParaRPr lang="pt-BR"/>
           </a:p>
@@ -1526,7 +1633,7 @@
           <a:p>
             <a:fld id="{0BA471F3-CE83-48E3-913B-238604523619}" type="slidenum">
               <a:rPr lang="pt-BR" smtClean="0"/>
-              <a:t>‹nº›</a:t>
+              <a:t>‹#›</a:t>
             </a:fld>
             <a:endParaRPr lang="pt-BR"/>
           </a:p>
@@ -1938,7 +2045,7 @@
           <a:p>
             <a:fld id="{0BA471F3-CE83-48E3-913B-238604523619}" type="slidenum">
               <a:rPr lang="pt-BR" smtClean="0"/>
-              <a:t>‹nº›</a:t>
+              <a:t>‹#›</a:t>
             </a:fld>
             <a:endParaRPr lang="pt-BR"/>
           </a:p>
@@ -2079,7 +2186,7 @@
           <a:p>
             <a:fld id="{0BA471F3-CE83-48E3-913B-238604523619}" type="slidenum">
               <a:rPr lang="pt-BR" smtClean="0"/>
-              <a:t>‹nº›</a:t>
+              <a:t>‹#›</a:t>
             </a:fld>
             <a:endParaRPr lang="pt-BR"/>
           </a:p>
@@ -2192,7 +2299,7 @@
           <a:p>
             <a:fld id="{0BA471F3-CE83-48E3-913B-238604523619}" type="slidenum">
               <a:rPr lang="pt-BR" smtClean="0"/>
-              <a:t>‹nº›</a:t>
+              <a:t>‹#›</a:t>
             </a:fld>
             <a:endParaRPr lang="pt-BR"/>
           </a:p>
@@ -2503,7 +2610,7 @@
           <a:p>
             <a:fld id="{0BA471F3-CE83-48E3-913B-238604523619}" type="slidenum">
               <a:rPr lang="pt-BR" smtClean="0"/>
-              <a:t>‹nº›</a:t>
+              <a:t>‹#›</a:t>
             </a:fld>
             <a:endParaRPr lang="pt-BR"/>
           </a:p>
@@ -2791,7 +2898,7 @@
           <a:p>
             <a:fld id="{0BA471F3-CE83-48E3-913B-238604523619}" type="slidenum">
               <a:rPr lang="pt-BR" smtClean="0"/>
-              <a:t>‹nº›</a:t>
+              <a:t>‹#›</a:t>
             </a:fld>
             <a:endParaRPr lang="pt-BR"/>
           </a:p>
@@ -3068,7 +3175,7 @@
           <a:p>
             <a:fld id="{0BA471F3-CE83-48E3-913B-238604523619}" type="slidenum">
               <a:rPr lang="pt-BR" smtClean="0"/>
-              <a:t>‹nº›</a:t>
+              <a:t>‹#›</a:t>
             </a:fld>
             <a:endParaRPr lang="pt-BR"/>
           </a:p>
@@ -3444,7 +3551,7 @@
           <a:p>
             <a:pPr algn="ctr"/>
             <a:r>
-              <a:rPr lang="pt-BR" dirty="0"/>
+              <a:rPr lang="pt-BR"/>
               <a:t>Estrutura DMS</a:t>
             </a:r>
           </a:p>
@@ -3529,7 +3636,7 @@
           <a:p>
             <a:pPr algn="ctr"/>
             <a:r>
-              <a:rPr lang="pt-BR" dirty="0"/>
+              <a:rPr lang="pt-BR"/>
               <a:t>Produto Marítimo </a:t>
             </a:r>
           </a:p>
@@ -3710,7 +3817,7 @@
           <a:p>
             <a:pPr algn="ctr"/>
             <a:r>
-              <a:rPr lang="pt-BR" dirty="0"/>
+              <a:rPr lang="pt-BR"/>
               <a:t>Estratégia </a:t>
             </a:r>
           </a:p>
@@ -3825,7 +3932,7 @@
           <a:p>
             <a:pPr algn="ctr"/>
             <a:r>
-              <a:rPr lang="pt-BR" dirty="0"/>
+              <a:rPr lang="pt-BR"/>
               <a:t>FD</a:t>
             </a:r>
           </a:p>
@@ -3860,13 +3967,13 @@
           <a:lstStyle/>
           <a:p>
             <a:r>
-              <a:rPr lang="pt-BR" dirty="0"/>
+              <a:rPr lang="pt-BR"/>
               <a:t>A estrutura é separada por Cliente</a:t>
             </a:r>
           </a:p>
           <a:p>
             <a:r>
-              <a:rPr lang="pt-BR" dirty="0"/>
+              <a:rPr lang="pt-BR"/>
               <a:t>Precisamos fazer essa abertura </a:t>
             </a:r>
           </a:p>
@@ -3981,7 +4088,7 @@
           <a:p>
             <a:pPr algn="ctr"/>
             <a:r>
-              <a:rPr lang="pt-BR" dirty="0"/>
+              <a:rPr lang="pt-BR"/>
               <a:t>RD</a:t>
             </a:r>
           </a:p>
@@ -4016,13 +4123,13 @@
           <a:lstStyle/>
           <a:p>
             <a:r>
-              <a:rPr lang="pt-BR" dirty="0"/>
+              <a:rPr lang="pt-BR"/>
               <a:t>A estrutura é separada por região - EUA | EUROPA | ASIA</a:t>
             </a:r>
           </a:p>
           <a:p>
             <a:r>
-              <a:rPr lang="pt-BR" dirty="0"/>
+              <a:rPr lang="pt-BR"/>
               <a:t>Precisamos fazer essa abertura </a:t>
             </a:r>
           </a:p>
@@ -4137,25 +4244,25 @@
           <a:p>
             <a:pPr algn="ctr"/>
             <a:r>
-              <a:rPr lang="pt-BR" dirty="0" err="1"/>
+              <a:rPr lang="pt-BR" err="1"/>
               <a:t>Prod</a:t>
             </a:r>
             <a:r>
-              <a:rPr lang="pt-BR" dirty="0"/>
+              <a:rPr lang="pt-BR"/>
               <a:t> </a:t>
             </a:r>
           </a:p>
           <a:p>
             <a:pPr algn="ctr"/>
             <a:r>
-              <a:rPr lang="pt-BR" dirty="0"/>
+              <a:rPr lang="pt-BR"/>
               <a:t>Aéreo</a:t>
             </a:r>
           </a:p>
           <a:p>
             <a:pPr algn="ctr"/>
             <a:r>
-              <a:rPr lang="pt-BR" dirty="0"/>
+              <a:rPr lang="pt-BR"/>
               <a:t>Sampaio</a:t>
             </a:r>
           </a:p>
@@ -4204,26 +4311,26 @@
           <a:p>
             <a:pPr algn="ctr"/>
             <a:r>
-              <a:rPr lang="pt-BR" dirty="0" err="1"/>
+              <a:rPr lang="pt-BR" err="1"/>
               <a:t>Prod</a:t>
             </a:r>
             <a:r>
-              <a:rPr lang="pt-BR" dirty="0"/>
+              <a:rPr lang="pt-BR"/>
               <a:t> </a:t>
             </a:r>
           </a:p>
           <a:p>
             <a:pPr algn="ctr"/>
             <a:r>
-              <a:rPr lang="pt-BR" dirty="0" err="1"/>
+              <a:rPr lang="pt-BR" err="1"/>
               <a:t>Maritimo</a:t>
             </a:r>
-            <a:endParaRPr lang="pt-BR" dirty="0"/>
+            <a:endParaRPr lang="pt-BR"/>
           </a:p>
           <a:p>
             <a:pPr algn="ctr"/>
             <a:r>
-              <a:rPr lang="pt-BR" dirty="0"/>
+              <a:rPr lang="pt-BR"/>
               <a:t>Filipe</a:t>
             </a:r>
           </a:p>
@@ -4420,7 +4527,7 @@
           <a:p>
             <a:pPr algn="ctr"/>
             <a:r>
-              <a:rPr lang="pt-BR" dirty="0"/>
+              <a:rPr lang="pt-BR"/>
               <a:t>Industria</a:t>
             </a:r>
           </a:p>
@@ -4601,7 +4708,7 @@
           <a:p>
             <a:pPr algn="ctr"/>
             <a:r>
-              <a:rPr lang="pt-BR" dirty="0"/>
+              <a:rPr lang="pt-BR"/>
               <a:t>Aerospace</a:t>
             </a:r>
           </a:p>
@@ -4716,7 +4823,7 @@
           <a:p>
             <a:pPr algn="ctr"/>
             <a:r>
-              <a:rPr lang="pt-BR" dirty="0"/>
+              <a:rPr lang="pt-BR"/>
               <a:t>Energy</a:t>
             </a:r>
           </a:p>
@@ -4780,8 +4887,8 @@
         </p:blipFill>
         <p:spPr>
           <a:xfrm>
-            <a:off x="365951" y="1882198"/>
-            <a:ext cx="9130590" cy="2698338"/>
+            <a:off x="487871" y="1714752"/>
+            <a:ext cx="10046919" cy="2987704"/>
           </a:xfrm>
           <a:prstGeom prst="rect">
             <a:avLst/>
@@ -4831,25 +4938,25 @@
           <a:p>
             <a:pPr algn="ctr"/>
             <a:r>
-              <a:rPr lang="pt-BR" dirty="0" err="1"/>
+              <a:rPr lang="pt-BR" err="1"/>
               <a:t>Prod</a:t>
             </a:r>
             <a:r>
-              <a:rPr lang="pt-BR" dirty="0"/>
+              <a:rPr lang="pt-BR"/>
               <a:t> </a:t>
             </a:r>
           </a:p>
           <a:p>
             <a:pPr algn="ctr"/>
             <a:r>
-              <a:rPr lang="pt-BR" dirty="0"/>
+              <a:rPr lang="pt-BR"/>
               <a:t>Aéreo</a:t>
             </a:r>
           </a:p>
           <a:p>
             <a:pPr algn="ctr"/>
             <a:r>
-              <a:rPr lang="pt-BR" dirty="0"/>
+              <a:rPr lang="pt-BR"/>
               <a:t>Sampaio</a:t>
             </a:r>
           </a:p>
@@ -4898,26 +5005,26 @@
           <a:p>
             <a:pPr algn="ctr"/>
             <a:r>
-              <a:rPr lang="pt-BR" dirty="0" err="1"/>
+              <a:rPr lang="pt-BR" err="1"/>
               <a:t>Prod</a:t>
             </a:r>
             <a:r>
-              <a:rPr lang="pt-BR" dirty="0"/>
+              <a:rPr lang="pt-BR"/>
               <a:t> </a:t>
             </a:r>
           </a:p>
           <a:p>
             <a:pPr algn="ctr"/>
             <a:r>
-              <a:rPr lang="pt-BR" dirty="0" err="1"/>
+              <a:rPr lang="pt-BR" err="1"/>
               <a:t>Maritimo</a:t>
             </a:r>
-            <a:endParaRPr lang="pt-BR" dirty="0"/>
+            <a:endParaRPr lang="pt-BR"/>
           </a:p>
           <a:p>
             <a:pPr algn="ctr"/>
             <a:r>
-              <a:rPr lang="pt-BR" dirty="0"/>
+              <a:rPr lang="pt-BR"/>
               <a:t>Filipe</a:t>
             </a:r>
           </a:p>
@@ -5144,15 +5251,15 @@
           <a:p>
             <a:pPr algn="ctr"/>
             <a:r>
-              <a:rPr lang="pt-BR" dirty="0"/>
+              <a:rPr lang="pt-BR"/>
               <a:t>Vertical, </a:t>
             </a:r>
             <a:r>
-              <a:rPr lang="pt-BR" dirty="0" err="1"/>
+              <a:rPr lang="pt-BR" err="1"/>
               <a:t>Hight</a:t>
             </a:r>
             <a:r>
-              <a:rPr lang="pt-BR" dirty="0"/>
+              <a:rPr lang="pt-BR"/>
               <a:t> Tec e Automotivo </a:t>
             </a:r>
           </a:p>
@@ -5342,7 +5449,7 @@
           <a:p>
             <a:pPr algn="ctr"/>
             <a:r>
-              <a:rPr lang="pt-BR" dirty="0"/>
+              <a:rPr lang="pt-BR"/>
               <a:t>Vertical</a:t>
             </a:r>
           </a:p>
@@ -5391,7 +5498,7 @@
           <a:p>
             <a:pPr algn="ctr"/>
             <a:r>
-              <a:rPr lang="pt-BR" dirty="0"/>
+              <a:rPr lang="pt-BR"/>
               <a:t>Auto</a:t>
             </a:r>
           </a:p>
@@ -5440,11 +5547,11 @@
           <a:p>
             <a:pPr algn="ctr"/>
             <a:r>
-              <a:rPr lang="pt-BR" dirty="0" err="1"/>
+              <a:rPr lang="pt-BR" err="1"/>
               <a:t>Hight</a:t>
             </a:r>
             <a:r>
-              <a:rPr lang="pt-BR" dirty="0"/>
+              <a:rPr lang="pt-BR"/>
               <a:t> Tec</a:t>
             </a:r>
           </a:p>
@@ -5493,7 +5600,7 @@
           <a:p>
             <a:pPr algn="ctr"/>
             <a:r>
-              <a:rPr lang="pt-BR" dirty="0"/>
+              <a:rPr lang="pt-BR"/>
               <a:t>Vaga de TL </a:t>
             </a:r>
           </a:p>
@@ -5608,7 +5715,7 @@
           <a:p>
             <a:pPr algn="ctr"/>
             <a:r>
-              <a:rPr lang="pt-BR" dirty="0"/>
+              <a:rPr lang="pt-BR"/>
               <a:t>Healthcare</a:t>
             </a:r>
           </a:p>
@@ -5723,25 +5830,25 @@
           <a:p>
             <a:pPr algn="ctr"/>
             <a:r>
-              <a:rPr lang="pt-BR" dirty="0" err="1"/>
+              <a:rPr lang="pt-BR" err="1"/>
               <a:t>Prod</a:t>
             </a:r>
             <a:r>
-              <a:rPr lang="pt-BR" dirty="0"/>
+              <a:rPr lang="pt-BR"/>
               <a:t> </a:t>
             </a:r>
           </a:p>
           <a:p>
             <a:pPr algn="ctr"/>
             <a:r>
-              <a:rPr lang="pt-BR" dirty="0"/>
+              <a:rPr lang="pt-BR"/>
               <a:t>Aéreo</a:t>
             </a:r>
           </a:p>
           <a:p>
             <a:pPr algn="ctr"/>
             <a:r>
-              <a:rPr lang="pt-BR" dirty="0"/>
+              <a:rPr lang="pt-BR"/>
               <a:t>Sampaio</a:t>
             </a:r>
           </a:p>
@@ -5790,26 +5897,26 @@
           <a:p>
             <a:pPr algn="ctr"/>
             <a:r>
-              <a:rPr lang="pt-BR" dirty="0" err="1"/>
+              <a:rPr lang="pt-BR" err="1"/>
               <a:t>Prod</a:t>
             </a:r>
             <a:r>
-              <a:rPr lang="pt-BR" dirty="0"/>
+              <a:rPr lang="pt-BR"/>
               <a:t> </a:t>
             </a:r>
           </a:p>
           <a:p>
             <a:pPr algn="ctr"/>
             <a:r>
-              <a:rPr lang="pt-BR" dirty="0" err="1"/>
+              <a:rPr lang="pt-BR" err="1"/>
               <a:t>Maritimo</a:t>
             </a:r>
-            <a:endParaRPr lang="pt-BR" dirty="0"/>
+            <a:endParaRPr lang="pt-BR"/>
           </a:p>
           <a:p>
             <a:pPr algn="ctr"/>
             <a:r>
-              <a:rPr lang="pt-BR" dirty="0"/>
+              <a:rPr lang="pt-BR"/>
               <a:t>Filipe</a:t>
             </a:r>
           </a:p>
@@ -6006,7 +6113,7 @@
           <a:p>
             <a:pPr algn="ctr"/>
             <a:r>
-              <a:rPr lang="pt-BR" dirty="0"/>
+              <a:rPr lang="pt-BR"/>
               <a:t>Tecnologia</a:t>
             </a:r>
           </a:p>
@@ -6107,7 +6214,7 @@
           <a:lstStyle/>
           <a:p>
             <a:r>
-              <a:rPr lang="pt-BR" dirty="0"/>
+              <a:rPr lang="pt-BR"/>
               <a:t>A estrutura foi ajustada recentemente pela Cleyton – temos que pegar a visão atualizada. </a:t>
             </a:r>
           </a:p>
@@ -6354,25 +6461,25 @@
           <a:p>
             <a:pPr algn="ctr"/>
             <a:r>
-              <a:rPr lang="pt-BR" dirty="0" err="1"/>
+              <a:rPr lang="pt-BR" err="1"/>
               <a:t>Prod</a:t>
             </a:r>
             <a:r>
-              <a:rPr lang="pt-BR" dirty="0"/>
+              <a:rPr lang="pt-BR"/>
               <a:t> </a:t>
             </a:r>
           </a:p>
           <a:p>
             <a:pPr algn="ctr"/>
             <a:r>
-              <a:rPr lang="pt-BR" dirty="0"/>
+              <a:rPr lang="pt-BR"/>
               <a:t>Aéreo</a:t>
             </a:r>
           </a:p>
           <a:p>
             <a:pPr algn="ctr"/>
             <a:r>
-              <a:rPr lang="pt-BR" dirty="0"/>
+              <a:rPr lang="pt-BR"/>
               <a:t>Sampaio</a:t>
             </a:r>
           </a:p>
@@ -6421,26 +6528,26 @@
           <a:p>
             <a:pPr algn="ctr"/>
             <a:r>
-              <a:rPr lang="pt-BR" dirty="0" err="1"/>
+              <a:rPr lang="pt-BR" err="1"/>
               <a:t>Prod</a:t>
             </a:r>
             <a:r>
-              <a:rPr lang="pt-BR" dirty="0"/>
+              <a:rPr lang="pt-BR"/>
               <a:t> </a:t>
             </a:r>
           </a:p>
           <a:p>
             <a:pPr algn="ctr"/>
             <a:r>
-              <a:rPr lang="pt-BR" dirty="0" err="1"/>
+              <a:rPr lang="pt-BR" err="1"/>
               <a:t>Maritimo</a:t>
             </a:r>
-            <a:endParaRPr lang="pt-BR" dirty="0"/>
+            <a:endParaRPr lang="pt-BR"/>
           </a:p>
           <a:p>
             <a:pPr algn="ctr"/>
             <a:r>
-              <a:rPr lang="pt-BR" dirty="0"/>
+              <a:rPr lang="pt-BR"/>
               <a:t>Filipe</a:t>
             </a:r>
           </a:p>
@@ -6637,7 +6744,7 @@
           <a:p>
             <a:pPr algn="ctr"/>
             <a:r>
-              <a:rPr lang="pt-BR" dirty="0"/>
+              <a:rPr lang="pt-BR"/>
               <a:t>Finanças</a:t>
             </a:r>
           </a:p>
@@ -6738,7 +6845,7 @@
           <a:lstStyle/>
           <a:p>
             <a:r>
-              <a:rPr lang="pt-BR" dirty="0"/>
+              <a:rPr lang="pt-BR"/>
               <a:t>A estrutura foi ajustada recentemente pela Ana Carol – temos que pegar a visão atualizada. </a:t>
             </a:r>
           </a:p>
@@ -6817,7 +6924,7 @@
           <a:p>
             <a:pPr algn="ctr"/>
             <a:r>
-              <a:rPr lang="pt-BR" dirty="0"/>
+              <a:rPr lang="pt-BR"/>
               <a:t>Produto Aéreo</a:t>
             </a:r>
           </a:p>
@@ -7262,25 +7369,25 @@
           <a:p>
             <a:pPr algn="ctr"/>
             <a:r>
-              <a:rPr lang="pt-BR" dirty="0" err="1"/>
+              <a:rPr lang="pt-BR" err="1"/>
               <a:t>Prod</a:t>
             </a:r>
             <a:r>
-              <a:rPr lang="pt-BR" dirty="0"/>
+              <a:rPr lang="pt-BR"/>
               <a:t> </a:t>
             </a:r>
           </a:p>
           <a:p>
             <a:pPr algn="ctr"/>
             <a:r>
-              <a:rPr lang="pt-BR" dirty="0"/>
+              <a:rPr lang="pt-BR"/>
               <a:t>Aéreo</a:t>
             </a:r>
           </a:p>
           <a:p>
             <a:pPr algn="ctr"/>
             <a:r>
-              <a:rPr lang="pt-BR" dirty="0"/>
+              <a:rPr lang="pt-BR"/>
               <a:t>Sampaio</a:t>
             </a:r>
           </a:p>
@@ -7329,26 +7436,26 @@
           <a:p>
             <a:pPr algn="ctr"/>
             <a:r>
-              <a:rPr lang="pt-BR" dirty="0" err="1"/>
+              <a:rPr lang="pt-BR" err="1"/>
               <a:t>Prod</a:t>
             </a:r>
             <a:r>
-              <a:rPr lang="pt-BR" dirty="0"/>
+              <a:rPr lang="pt-BR"/>
               <a:t> </a:t>
             </a:r>
           </a:p>
           <a:p>
             <a:pPr algn="ctr"/>
             <a:r>
-              <a:rPr lang="pt-BR" dirty="0" err="1"/>
+              <a:rPr lang="pt-BR" err="1"/>
               <a:t>Maritimo</a:t>
             </a:r>
-            <a:endParaRPr lang="pt-BR" dirty="0"/>
+            <a:endParaRPr lang="pt-BR"/>
           </a:p>
           <a:p>
             <a:pPr algn="ctr"/>
             <a:r>
-              <a:rPr lang="pt-BR" dirty="0"/>
+              <a:rPr lang="pt-BR"/>
               <a:t>Filipe</a:t>
             </a:r>
           </a:p>
@@ -7545,7 +7652,7 @@
           <a:p>
             <a:pPr algn="ctr"/>
             <a:r>
-              <a:rPr lang="pt-BR" dirty="0"/>
+              <a:rPr lang="pt-BR"/>
               <a:t>RH</a:t>
             </a:r>
           </a:p>
@@ -7609,7 +7716,7 @@
         </p:blipFill>
         <p:spPr>
           <a:xfrm>
-            <a:off x="1511615" y="2088052"/>
+            <a:off x="1646653" y="2088052"/>
             <a:ext cx="9168769" cy="2681896"/>
           </a:xfrm>
           <a:prstGeom prst="rect">
@@ -7646,15 +7753,15 @@
           <a:lstStyle/>
           <a:p>
             <a:r>
-              <a:rPr lang="pt-BR" dirty="0"/>
+              <a:rPr lang="pt-BR"/>
               <a:t>A estrutura foi ajustada recentemente pela </a:t>
             </a:r>
             <a:r>
-              <a:rPr lang="pt-BR" dirty="0" err="1"/>
+              <a:rPr lang="pt-BR" err="1"/>
               <a:t>Karnakis</a:t>
             </a:r>
             <a:r>
-              <a:rPr lang="pt-BR" dirty="0"/>
+              <a:rPr lang="pt-BR"/>
               <a:t> – temos que pegar a visão atualizada. </a:t>
             </a:r>
           </a:p>
@@ -8033,25 +8140,25 @@
           <a:p>
             <a:pPr algn="ctr"/>
             <a:r>
-              <a:rPr lang="pt-BR" dirty="0" err="1"/>
+              <a:rPr lang="pt-BR" err="1"/>
               <a:t>Prod</a:t>
             </a:r>
             <a:r>
-              <a:rPr lang="pt-BR" dirty="0"/>
+              <a:rPr lang="pt-BR"/>
               <a:t> </a:t>
             </a:r>
           </a:p>
           <a:p>
             <a:pPr algn="ctr"/>
             <a:r>
-              <a:rPr lang="pt-BR" dirty="0"/>
+              <a:rPr lang="pt-BR"/>
               <a:t>Aéreo</a:t>
             </a:r>
           </a:p>
           <a:p>
             <a:pPr algn="ctr"/>
             <a:r>
-              <a:rPr lang="pt-BR" dirty="0"/>
+              <a:rPr lang="pt-BR"/>
               <a:t>Sampaio</a:t>
             </a:r>
           </a:p>
@@ -8100,26 +8207,26 @@
           <a:p>
             <a:pPr algn="ctr"/>
             <a:r>
-              <a:rPr lang="pt-BR" dirty="0" err="1"/>
+              <a:rPr lang="pt-BR" err="1"/>
               <a:t>Prod</a:t>
             </a:r>
             <a:r>
-              <a:rPr lang="pt-BR" dirty="0"/>
+              <a:rPr lang="pt-BR"/>
               <a:t> </a:t>
             </a:r>
           </a:p>
           <a:p>
             <a:pPr algn="ctr"/>
             <a:r>
-              <a:rPr lang="pt-BR" dirty="0" err="1"/>
+              <a:rPr lang="pt-BR" err="1"/>
               <a:t>Maritimo</a:t>
             </a:r>
-            <a:endParaRPr lang="pt-BR" dirty="0"/>
+            <a:endParaRPr lang="pt-BR"/>
           </a:p>
           <a:p>
             <a:pPr algn="ctr"/>
             <a:r>
-              <a:rPr lang="pt-BR" dirty="0"/>
+              <a:rPr lang="pt-BR"/>
               <a:t>Filipe</a:t>
             </a:r>
           </a:p>
@@ -8316,14 +8423,14 @@
           <a:p>
             <a:pPr algn="ctr"/>
             <a:r>
-              <a:rPr lang="pt-BR" dirty="0"/>
+              <a:rPr lang="pt-BR"/>
               <a:t>Serviços</a:t>
             </a:r>
           </a:p>
           <a:p>
             <a:pPr algn="ctr"/>
             <a:r>
-              <a:rPr lang="pt-BR" dirty="0"/>
+              <a:rPr lang="pt-BR"/>
               <a:t>(Diligenciamento)  </a:t>
             </a:r>
           </a:p>
@@ -8504,25 +8611,25 @@
           <a:p>
             <a:pPr algn="ctr"/>
             <a:r>
-              <a:rPr lang="pt-BR" dirty="0" err="1"/>
+              <a:rPr lang="pt-BR" err="1"/>
               <a:t>Prod</a:t>
             </a:r>
             <a:r>
-              <a:rPr lang="pt-BR" dirty="0"/>
+              <a:rPr lang="pt-BR"/>
               <a:t> </a:t>
             </a:r>
           </a:p>
           <a:p>
             <a:pPr algn="ctr"/>
             <a:r>
-              <a:rPr lang="pt-BR" dirty="0"/>
+              <a:rPr lang="pt-BR"/>
               <a:t>Aéreo</a:t>
             </a:r>
           </a:p>
           <a:p>
             <a:pPr algn="ctr"/>
             <a:r>
-              <a:rPr lang="pt-BR" dirty="0"/>
+              <a:rPr lang="pt-BR"/>
               <a:t>Sampaio</a:t>
             </a:r>
           </a:p>
@@ -8571,26 +8678,26 @@
           <a:p>
             <a:pPr algn="ctr"/>
             <a:r>
-              <a:rPr lang="pt-BR" dirty="0" err="1"/>
+              <a:rPr lang="pt-BR" err="1"/>
               <a:t>Prod</a:t>
             </a:r>
             <a:r>
-              <a:rPr lang="pt-BR" dirty="0"/>
+              <a:rPr lang="pt-BR"/>
               <a:t> </a:t>
             </a:r>
           </a:p>
           <a:p>
             <a:pPr algn="ctr"/>
             <a:r>
-              <a:rPr lang="pt-BR" dirty="0" err="1"/>
+              <a:rPr lang="pt-BR" err="1"/>
               <a:t>Maritimo</a:t>
             </a:r>
-            <a:endParaRPr lang="pt-BR" dirty="0"/>
+            <a:endParaRPr lang="pt-BR"/>
           </a:p>
           <a:p>
             <a:pPr algn="ctr"/>
             <a:r>
-              <a:rPr lang="pt-BR" dirty="0"/>
+              <a:rPr lang="pt-BR"/>
               <a:t>Filipe</a:t>
             </a:r>
           </a:p>
@@ -8787,7 +8894,7 @@
           <a:p>
             <a:pPr algn="ctr"/>
             <a:r>
-              <a:rPr lang="pt-BR" dirty="0"/>
+              <a:rPr lang="pt-BR"/>
               <a:t>Operações</a:t>
             </a:r>
           </a:p>
@@ -9036,15 +9143,15 @@
           <a:lstStyle/>
           <a:p>
             <a:r>
-              <a:rPr lang="pt-BR" dirty="0"/>
+              <a:rPr lang="pt-BR"/>
               <a:t>A estrutura foi ajustada recentemente pelo </a:t>
             </a:r>
             <a:r>
-              <a:rPr lang="pt-BR" dirty="0" err="1"/>
+              <a:rPr lang="pt-BR" err="1"/>
               <a:t>Raioni</a:t>
             </a:r>
             <a:r>
-              <a:rPr lang="pt-BR" dirty="0"/>
+              <a:rPr lang="pt-BR"/>
               <a:t> – temos que pegar a visão atualizada. </a:t>
             </a:r>
           </a:p>
@@ -9129,22 +9236,22 @@
           <a:p>
             <a:pPr algn="ctr"/>
             <a:r>
-              <a:rPr lang="pt-BR" dirty="0"/>
+              <a:rPr lang="pt-BR"/>
               <a:t>Operações – Exportação e </a:t>
             </a:r>
             <a:r>
-              <a:rPr lang="pt-BR" dirty="0" err="1"/>
+              <a:rPr lang="pt-BR" err="1"/>
               <a:t>Customer</a:t>
             </a:r>
             <a:r>
-              <a:rPr lang="pt-BR" dirty="0"/>
+              <a:rPr lang="pt-BR"/>
               <a:t> </a:t>
             </a:r>
             <a:r>
-              <a:rPr lang="pt-BR" dirty="0" err="1"/>
+              <a:rPr lang="pt-BR" err="1"/>
               <a:t>Care</a:t>
             </a:r>
-            <a:endParaRPr lang="pt-BR" dirty="0"/>
+            <a:endParaRPr lang="pt-BR"/>
           </a:p>
         </p:txBody>
       </p:sp>
@@ -9397,7 +9504,7 @@
           <a:p>
             <a:pPr algn="ctr"/>
             <a:r>
-              <a:rPr lang="pt-BR" dirty="0"/>
+              <a:rPr lang="pt-BR"/>
               <a:t>Exportação</a:t>
             </a:r>
           </a:p>
@@ -9461,7 +9568,7 @@
         </p:blipFill>
         <p:spPr>
           <a:xfrm>
-            <a:off x="638944" y="1078452"/>
+            <a:off x="783628" y="1281008"/>
             <a:ext cx="10914111" cy="4301028"/>
           </a:xfrm>
           <a:prstGeom prst="rect">
@@ -9578,19 +9685,19 @@
           <a:p>
             <a:pPr algn="ctr"/>
             <a:r>
-              <a:rPr lang="pt-BR" dirty="0" err="1"/>
+              <a:rPr lang="pt-BR" err="1"/>
               <a:t>Customer</a:t>
             </a:r>
             <a:r>
-              <a:rPr lang="pt-BR" dirty="0"/>
+              <a:rPr lang="pt-BR"/>
               <a:t> </a:t>
             </a:r>
             <a:r>
-              <a:rPr lang="pt-BR" dirty="0" err="1"/>
+              <a:rPr lang="pt-BR" err="1"/>
               <a:t>Care</a:t>
             </a:r>
             <a:r>
-              <a:rPr lang="pt-BR" dirty="0"/>
+              <a:rPr lang="pt-BR"/>
               <a:t> </a:t>
             </a:r>
           </a:p>
@@ -10219,7 +10326,7 @@
           <a:p>
             <a:pPr algn="ctr"/>
             <a:r>
-              <a:rPr lang="pt-BR" dirty="0"/>
+              <a:rPr lang="pt-BR"/>
               <a:t>Operações Marítimo</a:t>
             </a:r>
           </a:p>
@@ -10466,7 +10573,7 @@
           <a:p>
             <a:pPr algn="ctr"/>
             <a:r>
-              <a:rPr lang="pt-BR" dirty="0"/>
+              <a:rPr lang="pt-BR"/>
               <a:t>RD</a:t>
             </a:r>
           </a:p>
@@ -10501,13 +10608,13 @@
           <a:lstStyle/>
           <a:p>
             <a:r>
-              <a:rPr lang="pt-BR" dirty="0"/>
+              <a:rPr lang="pt-BR"/>
               <a:t>A estrutura é separada por região - EUA | EUROPA | ASIA</a:t>
             </a:r>
           </a:p>
           <a:p>
             <a:r>
-              <a:rPr lang="pt-BR" dirty="0"/>
+              <a:rPr lang="pt-BR"/>
               <a:t>Precisamos fazer essa abertura </a:t>
             </a:r>
           </a:p>
@@ -10856,7 +10963,7 @@
           <a:p>
             <a:pPr algn="ctr"/>
             <a:r>
-              <a:rPr lang="pt-BR" dirty="0"/>
+              <a:rPr lang="pt-BR"/>
               <a:t>Operações Aéreo – EUA </a:t>
             </a:r>
           </a:p>
@@ -11067,7 +11174,7 @@
           <a:p>
             <a:pPr algn="ctr"/>
             <a:r>
-              <a:rPr lang="pt-BR" dirty="0"/>
+              <a:rPr lang="pt-BR"/>
               <a:t>Mia  </a:t>
             </a:r>
           </a:p>
@@ -11353,8 +11460,8 @@
         </p:blipFill>
         <p:spPr>
           <a:xfrm>
-            <a:off x="2377260" y="4419899"/>
-            <a:ext cx="8561200" cy="1626321"/>
+            <a:off x="2377260" y="4217343"/>
+            <a:ext cx="9622212" cy="1828877"/>
           </a:xfrm>
           <a:prstGeom prst="rect">
             <a:avLst/>
@@ -11470,7 +11577,7 @@
           <a:p>
             <a:pPr algn="ctr"/>
             <a:r>
-              <a:rPr lang="pt-BR" dirty="0"/>
+              <a:rPr lang="pt-BR"/>
               <a:t>FD</a:t>
             </a:r>
           </a:p>
@@ -11505,13 +11612,13 @@
           <a:lstStyle/>
           <a:p>
             <a:r>
-              <a:rPr lang="pt-BR" dirty="0"/>
+              <a:rPr lang="pt-BR"/>
               <a:t>A estrutura é separada por Cliente</a:t>
             </a:r>
           </a:p>
           <a:p>
             <a:r>
-              <a:rPr lang="pt-BR" dirty="0"/>
+              <a:rPr lang="pt-BR"/>
               <a:t>Precisamos fazer essa abertura </a:t>
             </a:r>
           </a:p>
@@ -11596,7 +11703,7 @@
           <a:p>
             <a:pPr algn="ctr"/>
             <a:r>
-              <a:rPr lang="pt-BR" dirty="0"/>
+              <a:rPr lang="pt-BR"/>
               <a:t>Inteligência Operacional </a:t>
             </a:r>
           </a:p>
@@ -11879,7 +11986,7 @@
           <a:p>
             <a:pPr algn="ctr"/>
             <a:r>
-              <a:rPr lang="pt-BR" dirty="0"/>
+              <a:rPr lang="pt-BR"/>
               <a:t>Excelência Operacional </a:t>
             </a:r>
           </a:p>
@@ -12084,7 +12191,7 @@
           <a:lstStyle/>
           <a:p>
             <a:r>
-              <a:rPr lang="pt-BR" dirty="0"/>
+              <a:rPr lang="pt-BR"/>
               <a:t>KAM</a:t>
             </a:r>
           </a:p>
@@ -12119,10 +12226,10 @@
           <a:lstStyle/>
           <a:p>
             <a:r>
-              <a:rPr lang="pt-BR" dirty="0" err="1"/>
+              <a:rPr lang="pt-BR" err="1"/>
               <a:t>Capacity</a:t>
             </a:r>
-            <a:endParaRPr lang="pt-BR" dirty="0"/>
+            <a:endParaRPr lang="pt-BR"/>
           </a:p>
         </p:txBody>
       </p:sp>
@@ -12235,7 +12342,7 @@
           <a:p>
             <a:pPr algn="ctr"/>
             <a:r>
-              <a:rPr lang="pt-BR" dirty="0"/>
+              <a:rPr lang="pt-BR"/>
               <a:t>FD</a:t>
             </a:r>
           </a:p>
@@ -12270,13 +12377,13 @@
           <a:lstStyle/>
           <a:p>
             <a:r>
-              <a:rPr lang="pt-BR" dirty="0"/>
+              <a:rPr lang="pt-BR"/>
               <a:t>A estrutura é separada por Cliente</a:t>
             </a:r>
           </a:p>
           <a:p>
             <a:r>
-              <a:rPr lang="pt-BR" dirty="0"/>
+              <a:rPr lang="pt-BR"/>
               <a:t>Precisamos fazer essa abertura </a:t>
             </a:r>
           </a:p>
@@ -12391,7 +12498,7 @@
           <a:p>
             <a:pPr algn="ctr"/>
             <a:r>
-              <a:rPr lang="pt-BR" dirty="0"/>
+              <a:rPr lang="pt-BR"/>
               <a:t>Estratégia </a:t>
             </a:r>
           </a:p>
